--- a/assets/pptx/catalog-1434.pptx
+++ b/assets/pptx/catalog-1434.pptx
@@ -4199,7 +4199,7 @@
                 <a:ea typeface="Ebrima"/>
                 <a:cs typeface="Ebrima"/>
               </a:rPr>
-              <a:t>ላመልክህ የተገባህ ጌታ አንተ ነህ (4x)</a:t>
+              <a:t>ላመልክህ የተገባህ ጌታ አንተ ነህ 4x</a:t>
             </a:r>
           </a:p>
         </p:txBody>
@@ -4266,25 +4266,25 @@
                 <a:ea typeface="Ebrima"/>
                 <a:cs typeface="Ebrima"/>
               </a:rPr>
-              <a:t>ጌታ (4x) ምሥጋናዬን እንካ</a:t>
-            </a:r>
-          </a:p>
-          <a:p>
-            <a:pPr algn="ctr">
-              <a:lnSpc>
-                <a:spcPct val="125000"/>
-              </a:lnSpc>
-            </a:pPr>
-            <a:r>
-              <a:rPr sz="4000" b="0">
-                <a:solidFill>
-                  <a:srgbClr val="FFFFFF"/>
-                </a:solidFill>
-                <a:latin typeface="Ebrima"/>
-                <a:ea typeface="Ebrima"/>
-                <a:cs typeface="Ebrima"/>
-              </a:rPr>
-              <a:t>ጌታ (4x) አምልኮዬን እንካ</a:t>
+              <a:t>ጌታ 4x ምሥጋናዬን እንካ</a:t>
+            </a:r>
+          </a:p>
+          <a:p>
+            <a:pPr algn="ctr">
+              <a:lnSpc>
+                <a:spcPct val="125000"/>
+              </a:lnSpc>
+            </a:pPr>
+            <a:r>
+              <a:rPr sz="4000" b="0">
+                <a:solidFill>
+                  <a:srgbClr val="FFFFFF"/>
+                </a:solidFill>
+                <a:latin typeface="Ebrima"/>
+                <a:ea typeface="Ebrima"/>
+                <a:cs typeface="Ebrima"/>
+              </a:rPr>
+              <a:t>ጌታ 4x አምልኮዬን እንካ</a:t>
             </a:r>
           </a:p>
         </p:txBody>
@@ -5074,7 +5074,7 @@
                 <a:ea typeface="Ebrima"/>
                 <a:cs typeface="Ebrima"/>
               </a:rPr>
-              <a:t>እግዚአብሔር እንዴት ድንቅ ነው (3x)</a:t>
+              <a:t>እግዚአብሔር እንዴት ድንቅ ነው 3x</a:t>
             </a:r>
           </a:p>
         </p:txBody>
@@ -5177,7 +5177,7 @@
                 <a:ea typeface="Ebrima"/>
                 <a:cs typeface="Ebrima"/>
               </a:rPr>
-              <a:t>ኧረ እንዴት አመስግኜው ልርካ (4x)</a:t>
+              <a:t>ኧረ እንዴት አመስግኜው ልርካ 4x</a:t>
             </a:r>
           </a:p>
         </p:txBody>
@@ -5419,7 +5419,7 @@
                 <a:ea typeface="Ebrima"/>
                 <a:cs typeface="Ebrima"/>
               </a:rPr>
-              <a:t>እሩህሩህነትህ አቤት አቤት አቤት (2x)</a:t>
+              <a:t>እሩህሩህነትህ አቤት አቤት አቤት 2x</a:t>
             </a:r>
           </a:p>
         </p:txBody>
@@ -5661,7 +5661,7 @@
                 <a:ea typeface="Ebrima"/>
                 <a:cs typeface="Ebrima"/>
               </a:rPr>
-              <a:t>ቢፈለግ ዘላለም አቤት አቤት አቤት (2x)</a:t>
+              <a:t>ቢፈለግ ዘላለም አቤት አቤት አቤት 2x</a:t>
             </a:r>
           </a:p>
         </p:txBody>
@@ -5764,7 +5764,7 @@
                 <a:ea typeface="Ebrima"/>
                 <a:cs typeface="Ebrima"/>
               </a:rPr>
-              <a:t>ኧረ እንዴት አመስግኜው ልርካ(4x)</a:t>
+              <a:t>ኧረ እንዴት አመስግኜው ልርካ4x</a:t>
             </a:r>
           </a:p>
         </p:txBody>
@@ -6333,7 +6333,7 @@
                 <a:ea typeface="Ebrima"/>
                 <a:cs typeface="Ebrima"/>
               </a:rPr>
-              <a:t>እግዚአብሔር እኔን መውደዱ (2x)</a:t>
+              <a:t>እግዚአብሔር እኔን መውደዱ 2x</a:t>
             </a:r>
           </a:p>
           <a:p>
